--- a/Lecture_2_UAT.pptx
+++ b/Lecture_2_UAT.pptx
@@ -233,7 +233,7 @@
           <a:p>
             <a:fld id="{AA24CD06-CDB8-463C-82C0-327730F8ACA7}" type="datetimeFigureOut">
               <a:rPr lang="en-US" smtClean="0"/>
-              <a:t>3/17/2026</a:t>
+              <a:t>3/30/2026</a:t>
             </a:fld>
             <a:endParaRPr lang="en-US"/>
           </a:p>
@@ -3740,7 +3740,7 @@
           <a:p>
             <a:fld id="{29F8D91E-FFF0-45B5-AFE0-22E101FDFDBC}" type="datetimeFigureOut">
               <a:rPr lang="en-US" smtClean="0"/>
-              <a:t>3/17/2026</a:t>
+              <a:t>3/30/2026</a:t>
             </a:fld>
             <a:endParaRPr lang="en-US"/>
           </a:p>
@@ -3910,7 +3910,7 @@
           <a:p>
             <a:fld id="{29F8D91E-FFF0-45B5-AFE0-22E101FDFDBC}" type="datetimeFigureOut">
               <a:rPr lang="en-US" smtClean="0"/>
-              <a:t>3/17/2026</a:t>
+              <a:t>3/30/2026</a:t>
             </a:fld>
             <a:endParaRPr lang="en-US"/>
           </a:p>
@@ -4090,7 +4090,7 @@
           <a:p>
             <a:fld id="{29F8D91E-FFF0-45B5-AFE0-22E101FDFDBC}" type="datetimeFigureOut">
               <a:rPr lang="en-US" smtClean="0"/>
-              <a:t>3/17/2026</a:t>
+              <a:t>3/30/2026</a:t>
             </a:fld>
             <a:endParaRPr lang="en-US"/>
           </a:p>
@@ -4260,7 +4260,7 @@
           <a:p>
             <a:fld id="{29F8D91E-FFF0-45B5-AFE0-22E101FDFDBC}" type="datetimeFigureOut">
               <a:rPr lang="en-US" smtClean="0"/>
-              <a:t>3/17/2026</a:t>
+              <a:t>3/30/2026</a:t>
             </a:fld>
             <a:endParaRPr lang="en-US"/>
           </a:p>
@@ -4504,7 +4504,7 @@
           <a:p>
             <a:fld id="{29F8D91E-FFF0-45B5-AFE0-22E101FDFDBC}" type="datetimeFigureOut">
               <a:rPr lang="en-US" smtClean="0"/>
-              <a:t>3/17/2026</a:t>
+              <a:t>3/30/2026</a:t>
             </a:fld>
             <a:endParaRPr lang="en-US"/>
           </a:p>
@@ -4736,7 +4736,7 @@
           <a:p>
             <a:fld id="{29F8D91E-FFF0-45B5-AFE0-22E101FDFDBC}" type="datetimeFigureOut">
               <a:rPr lang="en-US" smtClean="0"/>
-              <a:t>3/17/2026</a:t>
+              <a:t>3/30/2026</a:t>
             </a:fld>
             <a:endParaRPr lang="en-US"/>
           </a:p>
@@ -5103,7 +5103,7 @@
           <a:p>
             <a:fld id="{29F8D91E-FFF0-45B5-AFE0-22E101FDFDBC}" type="datetimeFigureOut">
               <a:rPr lang="en-US" smtClean="0"/>
-              <a:t>3/17/2026</a:t>
+              <a:t>3/30/2026</a:t>
             </a:fld>
             <a:endParaRPr lang="en-US"/>
           </a:p>
@@ -5221,7 +5221,7 @@
           <a:p>
             <a:fld id="{29F8D91E-FFF0-45B5-AFE0-22E101FDFDBC}" type="datetimeFigureOut">
               <a:rPr lang="en-US" smtClean="0"/>
-              <a:t>3/17/2026</a:t>
+              <a:t>3/30/2026</a:t>
             </a:fld>
             <a:endParaRPr lang="en-US"/>
           </a:p>
@@ -5316,7 +5316,7 @@
           <a:p>
             <a:fld id="{29F8D91E-FFF0-45B5-AFE0-22E101FDFDBC}" type="datetimeFigureOut">
               <a:rPr lang="en-US" smtClean="0"/>
-              <a:t>3/17/2026</a:t>
+              <a:t>3/30/2026</a:t>
             </a:fld>
             <a:endParaRPr lang="en-US"/>
           </a:p>
@@ -5593,7 +5593,7 @@
           <a:p>
             <a:fld id="{29F8D91E-FFF0-45B5-AFE0-22E101FDFDBC}" type="datetimeFigureOut">
               <a:rPr lang="en-US" smtClean="0"/>
-              <a:t>3/17/2026</a:t>
+              <a:t>3/30/2026</a:t>
             </a:fld>
             <a:endParaRPr lang="en-US"/>
           </a:p>
@@ -5850,7 +5850,7 @@
           <a:p>
             <a:fld id="{29F8D91E-FFF0-45B5-AFE0-22E101FDFDBC}" type="datetimeFigureOut">
               <a:rPr lang="en-US" smtClean="0"/>
-              <a:t>3/17/2026</a:t>
+              <a:t>3/30/2026</a:t>
             </a:fld>
             <a:endParaRPr lang="en-US"/>
           </a:p>
@@ -6063,7 +6063,7 @@
           <a:p>
             <a:fld id="{29F8D91E-FFF0-45B5-AFE0-22E101FDFDBC}" type="datetimeFigureOut">
               <a:rPr lang="en-US" smtClean="0"/>
-              <a:t>3/17/2026</a:t>
+              <a:t>3/30/2026</a:t>
             </a:fld>
             <a:endParaRPr lang="en-US"/>
           </a:p>
@@ -29011,42 +29011,6 @@
           <a:chExt cx="0" cy="0"/>
         </a:xfrm>
       </p:grpSpPr>
-      <p:pic>
-        <p:nvPicPr>
-          <p:cNvPr id="9" name="图片 8">
-            <a:extLst>
-              <a:ext uri="{FF2B5EF4-FFF2-40B4-BE49-F238E27FC236}">
-                <a16:creationId xmlns:a16="http://schemas.microsoft.com/office/drawing/2014/main" id="{87EB7682-BD29-4BEB-92E2-8823C47A990E}"/>
-              </a:ext>
-            </a:extLst>
-          </p:cNvPr>
-          <p:cNvPicPr>
-            <a:picLocks noChangeAspect="1"/>
-          </p:cNvPicPr>
-          <p:nvPr/>
-        </p:nvPicPr>
-        <p:blipFill>
-          <a:blip r:embed="rId3">
-            <a:extLst>
-              <a:ext uri="{28A0092B-C50C-407E-A947-70E740481C1C}">
-                <a14:useLocalDpi xmlns:a14="http://schemas.microsoft.com/office/drawing/2010/main" val="0"/>
-              </a:ext>
-            </a:extLst>
-          </a:blip>
-          <a:stretch>
-            <a:fillRect/>
-          </a:stretch>
-        </p:blipFill>
-        <p:spPr>
-          <a:xfrm>
-            <a:off x="4639945" y="2734112"/>
-            <a:ext cx="3451306" cy="3152844"/>
-          </a:xfrm>
-          <a:prstGeom prst="rect">
-            <a:avLst/>
-          </a:prstGeom>
-        </p:spPr>
-      </p:pic>
       <p:sp>
         <p:nvSpPr>
           <p:cNvPr id="8" name="圆角矩形 7"/>
@@ -29656,7 +29620,7 @@
                             </p:stCondLst>
                             <p:childTnLst>
                               <p:par>
-                                <p:cTn id="5" presetID="26" presetClass="entr" presetSubtype="0" fill="hold" nodeType="clickEffect">
+                                <p:cTn id="5" presetID="31" presetClass="entr" presetSubtype="0" fill="hold" nodeType="clickEffect">
                                   <p:stCondLst>
                                     <p:cond delay="0"/>
                                   </p:stCondLst>
@@ -29664,302 +29628,6 @@
                                     <p:set>
                                       <p:cBhvr>
                                         <p:cTn id="6" dur="1" fill="hold">
-                                          <p:stCondLst>
-                                            <p:cond delay="0"/>
-                                          </p:stCondLst>
-                                        </p:cTn>
-                                        <p:tgtEl>
-                                          <p:spTgt spid="9"/>
-                                        </p:tgtEl>
-                                        <p:attrNameLst>
-                                          <p:attrName>style.visibility</p:attrName>
-                                        </p:attrNameLst>
-                                      </p:cBhvr>
-                                      <p:to>
-                                        <p:strVal val="visible"/>
-                                      </p:to>
-                                    </p:set>
-                                    <p:animEffect transition="in" filter="wipe(down)">
-                                      <p:cBhvr>
-                                        <p:cTn id="7" dur="580">
-                                          <p:stCondLst>
-                                            <p:cond delay="0"/>
-                                          </p:stCondLst>
-                                        </p:cTn>
-                                        <p:tgtEl>
-                                          <p:spTgt spid="9"/>
-                                        </p:tgtEl>
-                                      </p:cBhvr>
-                                    </p:animEffect>
-                                    <p:anim calcmode="lin" valueType="num">
-                                      <p:cBhvr>
-                                        <p:cTn id="8" dur="1822" tmFilter="0,0; 0.14,0.36; 0.43,0.73; 0.71,0.91; 1.0,1.0">
-                                          <p:stCondLst>
-                                            <p:cond delay="0"/>
-                                          </p:stCondLst>
-                                        </p:cTn>
-                                        <p:tgtEl>
-                                          <p:spTgt spid="9"/>
-                                        </p:tgtEl>
-                                        <p:attrNameLst>
-                                          <p:attrName>ppt_x</p:attrName>
-                                        </p:attrNameLst>
-                                      </p:cBhvr>
-                                      <p:tavLst>
-                                        <p:tav tm="0">
-                                          <p:val>
-                                            <p:strVal val="#ppt_x-0.25"/>
-                                          </p:val>
-                                        </p:tav>
-                                        <p:tav tm="100000">
-                                          <p:val>
-                                            <p:strVal val="#ppt_x"/>
-                                          </p:val>
-                                        </p:tav>
-                                      </p:tavLst>
-                                    </p:anim>
-                                    <p:anim calcmode="lin" valueType="num">
-                                      <p:cBhvr>
-                                        <p:cTn id="9" dur="664" tmFilter="0.0,0.0; 0.25,0.07; 0.50,0.2; 0.75,0.467; 1.0,1.0">
-                                          <p:stCondLst>
-                                            <p:cond delay="0"/>
-                                          </p:stCondLst>
-                                        </p:cTn>
-                                        <p:tgtEl>
-                                          <p:spTgt spid="9"/>
-                                        </p:tgtEl>
-                                        <p:attrNameLst>
-                                          <p:attrName>ppt_y</p:attrName>
-                                        </p:attrNameLst>
-                                      </p:cBhvr>
-                                      <p:tavLst>
-                                        <p:tav tm="0" fmla="#ppt_y-sin(pi*$)/3">
-                                          <p:val>
-                                            <p:fltVal val="0.5"/>
-                                          </p:val>
-                                        </p:tav>
-                                        <p:tav tm="100000">
-                                          <p:val>
-                                            <p:fltVal val="1"/>
-                                          </p:val>
-                                        </p:tav>
-                                      </p:tavLst>
-                                    </p:anim>
-                                    <p:anim calcmode="lin" valueType="num">
-                                      <p:cBhvr>
-                                        <p:cTn id="10" dur="664" tmFilter="0, 0; 0.125,0.2665; 0.25,0.4; 0.375,0.465; 0.5,0.5;  0.625,0.535; 0.75,0.6; 0.875,0.7335; 1,1">
-                                          <p:stCondLst>
-                                            <p:cond delay="664"/>
-                                          </p:stCondLst>
-                                        </p:cTn>
-                                        <p:tgtEl>
-                                          <p:spTgt spid="9"/>
-                                        </p:tgtEl>
-                                        <p:attrNameLst>
-                                          <p:attrName>ppt_y</p:attrName>
-                                        </p:attrNameLst>
-                                      </p:cBhvr>
-                                      <p:tavLst>
-                                        <p:tav tm="0" fmla="#ppt_y-sin(pi*$)/9">
-                                          <p:val>
-                                            <p:fltVal val="0"/>
-                                          </p:val>
-                                        </p:tav>
-                                        <p:tav tm="100000">
-                                          <p:val>
-                                            <p:fltVal val="1"/>
-                                          </p:val>
-                                        </p:tav>
-                                      </p:tavLst>
-                                    </p:anim>
-                                    <p:anim calcmode="lin" valueType="num">
-                                      <p:cBhvr>
-                                        <p:cTn id="11" dur="332" tmFilter="0, 0; 0.125,0.2665; 0.25,0.4; 0.375,0.465; 0.5,0.5;  0.625,0.535; 0.75,0.6; 0.875,0.7335; 1,1">
-                                          <p:stCondLst>
-                                            <p:cond delay="1324"/>
-                                          </p:stCondLst>
-                                        </p:cTn>
-                                        <p:tgtEl>
-                                          <p:spTgt spid="9"/>
-                                        </p:tgtEl>
-                                        <p:attrNameLst>
-                                          <p:attrName>ppt_y</p:attrName>
-                                        </p:attrNameLst>
-                                      </p:cBhvr>
-                                      <p:tavLst>
-                                        <p:tav tm="0" fmla="#ppt_y-sin(pi*$)/27">
-                                          <p:val>
-                                            <p:fltVal val="0"/>
-                                          </p:val>
-                                        </p:tav>
-                                        <p:tav tm="100000">
-                                          <p:val>
-                                            <p:fltVal val="1"/>
-                                          </p:val>
-                                        </p:tav>
-                                      </p:tavLst>
-                                    </p:anim>
-                                    <p:anim calcmode="lin" valueType="num">
-                                      <p:cBhvr>
-                                        <p:cTn id="12" dur="164" tmFilter="0, 0; 0.125,0.2665; 0.25,0.4; 0.375,0.465; 0.5,0.5;  0.625,0.535; 0.75,0.6; 0.875,0.7335; 1,1">
-                                          <p:stCondLst>
-                                            <p:cond delay="1656"/>
-                                          </p:stCondLst>
-                                        </p:cTn>
-                                        <p:tgtEl>
-                                          <p:spTgt spid="9"/>
-                                        </p:tgtEl>
-                                        <p:attrNameLst>
-                                          <p:attrName>ppt_y</p:attrName>
-                                        </p:attrNameLst>
-                                      </p:cBhvr>
-                                      <p:tavLst>
-                                        <p:tav tm="0" fmla="#ppt_y-sin(pi*$)/81">
-                                          <p:val>
-                                            <p:fltVal val="0"/>
-                                          </p:val>
-                                        </p:tav>
-                                        <p:tav tm="100000">
-                                          <p:val>
-                                            <p:fltVal val="1"/>
-                                          </p:val>
-                                        </p:tav>
-                                      </p:tavLst>
-                                    </p:anim>
-                                    <p:animScale>
-                                      <p:cBhvr>
-                                        <p:cTn id="13" dur="26">
-                                          <p:stCondLst>
-                                            <p:cond delay="650"/>
-                                          </p:stCondLst>
-                                        </p:cTn>
-                                        <p:tgtEl>
-                                          <p:spTgt spid="9"/>
-                                        </p:tgtEl>
-                                      </p:cBhvr>
-                                      <p:to x="100000" y="60000"/>
-                                    </p:animScale>
-                                    <p:animScale>
-                                      <p:cBhvr>
-                                        <p:cTn id="14" dur="166" decel="50000">
-                                          <p:stCondLst>
-                                            <p:cond delay="676"/>
-                                          </p:stCondLst>
-                                        </p:cTn>
-                                        <p:tgtEl>
-                                          <p:spTgt spid="9"/>
-                                        </p:tgtEl>
-                                      </p:cBhvr>
-                                      <p:to x="100000" y="100000"/>
-                                    </p:animScale>
-                                    <p:animScale>
-                                      <p:cBhvr>
-                                        <p:cTn id="15" dur="26">
-                                          <p:stCondLst>
-                                            <p:cond delay="1312"/>
-                                          </p:stCondLst>
-                                        </p:cTn>
-                                        <p:tgtEl>
-                                          <p:spTgt spid="9"/>
-                                        </p:tgtEl>
-                                      </p:cBhvr>
-                                      <p:to x="100000" y="80000"/>
-                                    </p:animScale>
-                                    <p:animScale>
-                                      <p:cBhvr>
-                                        <p:cTn id="16" dur="166" decel="50000">
-                                          <p:stCondLst>
-                                            <p:cond delay="1338"/>
-                                          </p:stCondLst>
-                                        </p:cTn>
-                                        <p:tgtEl>
-                                          <p:spTgt spid="9"/>
-                                        </p:tgtEl>
-                                      </p:cBhvr>
-                                      <p:to x="100000" y="100000"/>
-                                    </p:animScale>
-                                    <p:animScale>
-                                      <p:cBhvr>
-                                        <p:cTn id="17" dur="26">
-                                          <p:stCondLst>
-                                            <p:cond delay="1642"/>
-                                          </p:stCondLst>
-                                        </p:cTn>
-                                        <p:tgtEl>
-                                          <p:spTgt spid="9"/>
-                                        </p:tgtEl>
-                                      </p:cBhvr>
-                                      <p:to x="100000" y="90000"/>
-                                    </p:animScale>
-                                    <p:animScale>
-                                      <p:cBhvr>
-                                        <p:cTn id="18" dur="166" decel="50000">
-                                          <p:stCondLst>
-                                            <p:cond delay="1668"/>
-                                          </p:stCondLst>
-                                        </p:cTn>
-                                        <p:tgtEl>
-                                          <p:spTgt spid="9"/>
-                                        </p:tgtEl>
-                                      </p:cBhvr>
-                                      <p:to x="100000" y="100000"/>
-                                    </p:animScale>
-                                    <p:animScale>
-                                      <p:cBhvr>
-                                        <p:cTn id="19" dur="26">
-                                          <p:stCondLst>
-                                            <p:cond delay="1808"/>
-                                          </p:stCondLst>
-                                        </p:cTn>
-                                        <p:tgtEl>
-                                          <p:spTgt spid="9"/>
-                                        </p:tgtEl>
-                                      </p:cBhvr>
-                                      <p:to x="100000" y="95000"/>
-                                    </p:animScale>
-                                    <p:animScale>
-                                      <p:cBhvr>
-                                        <p:cTn id="20" dur="166" decel="50000">
-                                          <p:stCondLst>
-                                            <p:cond delay="1834"/>
-                                          </p:stCondLst>
-                                        </p:cTn>
-                                        <p:tgtEl>
-                                          <p:spTgt spid="9"/>
-                                        </p:tgtEl>
-                                      </p:cBhvr>
-                                      <p:to x="100000" y="100000"/>
-                                    </p:animScale>
-                                  </p:childTnLst>
-                                </p:cTn>
-                              </p:par>
-                            </p:childTnLst>
-                          </p:cTn>
-                        </p:par>
-                      </p:childTnLst>
-                    </p:cTn>
-                  </p:par>
-                  <p:par>
-                    <p:cTn id="21" fill="hold">
-                      <p:stCondLst>
-                        <p:cond delay="indefinite"/>
-                      </p:stCondLst>
-                      <p:childTnLst>
-                        <p:par>
-                          <p:cTn id="22" fill="hold">
-                            <p:stCondLst>
-                              <p:cond delay="0"/>
-                            </p:stCondLst>
-                            <p:childTnLst>
-                              <p:par>
-                                <p:cTn id="23" presetID="31" presetClass="entr" presetSubtype="0" fill="hold" nodeType="clickEffect">
-                                  <p:stCondLst>
-                                    <p:cond delay="0"/>
-                                  </p:stCondLst>
-                                  <p:childTnLst>
-                                    <p:set>
-                                      <p:cBhvr>
-                                        <p:cTn id="24" dur="1" fill="hold">
                                           <p:stCondLst>
                                             <p:cond delay="0"/>
                                           </p:stCondLst>
@@ -29977,7 +29645,7 @@
                                     </p:set>
                                     <p:anim calcmode="lin" valueType="num">
                                       <p:cBhvr>
-                                        <p:cTn id="25" dur="1000" fill="hold"/>
+                                        <p:cTn id="7" dur="1000" fill="hold"/>
                                         <p:tgtEl>
                                           <p:spTgt spid="6"/>
                                         </p:tgtEl>
@@ -30000,7 +29668,7 @@
                                     </p:anim>
                                     <p:anim calcmode="lin" valueType="num">
                                       <p:cBhvr>
-                                        <p:cTn id="26" dur="1000" fill="hold"/>
+                                        <p:cTn id="8" dur="1000" fill="hold"/>
                                         <p:tgtEl>
                                           <p:spTgt spid="6"/>
                                         </p:tgtEl>
@@ -30023,7 +29691,7 @@
                                     </p:anim>
                                     <p:anim calcmode="lin" valueType="num">
                                       <p:cBhvr>
-                                        <p:cTn id="27" dur="1000" fill="hold"/>
+                                        <p:cTn id="9" dur="1000" fill="hold"/>
                                         <p:tgtEl>
                                           <p:spTgt spid="6"/>
                                         </p:tgtEl>
@@ -30046,7 +29714,7 @@
                                     </p:anim>
                                     <p:animEffect transition="in" filter="fade">
                                       <p:cBhvr>
-                                        <p:cTn id="28" dur="1000"/>
+                                        <p:cTn id="10" dur="1000"/>
                                         <p:tgtEl>
                                           <p:spTgt spid="6"/>
                                         </p:tgtEl>
@@ -32945,41 +32613,6 @@
           </p:sp>
         </mc:Fallback>
       </mc:AlternateContent>
-      <p:pic>
-        <p:nvPicPr>
-          <p:cNvPr id="4" name="图片 3">
-            <a:extLst>
-              <a:ext uri="{FF2B5EF4-FFF2-40B4-BE49-F238E27FC236}">
-                <a16:creationId xmlns:a16="http://schemas.microsoft.com/office/drawing/2014/main" id="{61E7B888-6119-4519-8E37-17ECDCFB91F9}"/>
-              </a:ext>
-            </a:extLst>
-          </p:cNvPr>
-          <p:cNvPicPr>
-            <a:picLocks noChangeAspect="1"/>
-          </p:cNvPicPr>
-          <p:nvPr/>
-        </p:nvPicPr>
-        <p:blipFill rotWithShape="1">
-          <a:blip r:embed="rId12" cstate="print">
-            <a:extLst>
-              <a:ext uri="{28A0092B-C50C-407E-A947-70E740481C1C}">
-                <a14:useLocalDpi xmlns:a14="http://schemas.microsoft.com/office/drawing/2010/main" val="0"/>
-              </a:ext>
-            </a:extLst>
-          </a:blip>
-          <a:srcRect l="13771" r="19355"/>
-          <a:stretch/>
-        </p:blipFill>
-        <p:spPr>
-          <a:xfrm>
-            <a:off x="4021709" y="3258969"/>
-            <a:ext cx="1404574" cy="1437391"/>
-          </a:xfrm>
-          <a:prstGeom prst="rect">
-            <a:avLst/>
-          </a:prstGeom>
-        </p:spPr>
-      </p:pic>
     </p:spTree>
     <p:extLst>
       <p:ext uri="{BB962C8B-B14F-4D97-AF65-F5344CB8AC3E}">
@@ -32998,135 +32631,6 @@
       <p:transition spd="slow" advTm="792"/>
     </mc:Fallback>
   </mc:AlternateContent>
-  <p:timing>
-    <p:tnLst>
-      <p:par>
-        <p:cTn id="1" dur="indefinite" restart="never" nodeType="tmRoot">
-          <p:childTnLst>
-            <p:seq concurrent="1" nextAc="seek">
-              <p:cTn id="2" dur="indefinite" nodeType="mainSeq">
-                <p:childTnLst>
-                  <p:par>
-                    <p:cTn id="3" fill="hold">
-                      <p:stCondLst>
-                        <p:cond delay="indefinite"/>
-                      </p:stCondLst>
-                      <p:childTnLst>
-                        <p:par>
-                          <p:cTn id="4" fill="hold">
-                            <p:stCondLst>
-                              <p:cond delay="0"/>
-                            </p:stCondLst>
-                            <p:childTnLst>
-                              <p:par>
-                                <p:cTn id="5" presetID="45" presetClass="entr" presetSubtype="0" fill="hold" nodeType="clickEffect">
-                                  <p:stCondLst>
-                                    <p:cond delay="0"/>
-                                  </p:stCondLst>
-                                  <p:childTnLst>
-                                    <p:set>
-                                      <p:cBhvr>
-                                        <p:cTn id="6" dur="1" fill="hold">
-                                          <p:stCondLst>
-                                            <p:cond delay="0"/>
-                                          </p:stCondLst>
-                                        </p:cTn>
-                                        <p:tgtEl>
-                                          <p:spTgt spid="4"/>
-                                        </p:tgtEl>
-                                        <p:attrNameLst>
-                                          <p:attrName>style.visibility</p:attrName>
-                                        </p:attrNameLst>
-                                      </p:cBhvr>
-                                      <p:to>
-                                        <p:strVal val="visible"/>
-                                      </p:to>
-                                    </p:set>
-                                    <p:animEffect transition="in" filter="fade">
-                                      <p:cBhvr>
-                                        <p:cTn id="7" dur="2000"/>
-                                        <p:tgtEl>
-                                          <p:spTgt spid="4"/>
-                                        </p:tgtEl>
-                                      </p:cBhvr>
-                                    </p:animEffect>
-                                    <p:anim calcmode="lin" valueType="num">
-                                      <p:cBhvr>
-                                        <p:cTn id="8" dur="2000" fill="hold"/>
-                                        <p:tgtEl>
-                                          <p:spTgt spid="4"/>
-                                        </p:tgtEl>
-                                        <p:attrNameLst>
-                                          <p:attrName>ppt_w</p:attrName>
-                                        </p:attrNameLst>
-                                      </p:cBhvr>
-                                      <p:tavLst>
-                                        <p:tav tm="0" fmla="#ppt_w*sin(2.5*pi*$)">
-                                          <p:val>
-                                            <p:fltVal val="0"/>
-                                          </p:val>
-                                        </p:tav>
-                                        <p:tav tm="100000">
-                                          <p:val>
-                                            <p:fltVal val="1"/>
-                                          </p:val>
-                                        </p:tav>
-                                      </p:tavLst>
-                                    </p:anim>
-                                    <p:anim calcmode="lin" valueType="num">
-                                      <p:cBhvr>
-                                        <p:cTn id="9" dur="2000" fill="hold"/>
-                                        <p:tgtEl>
-                                          <p:spTgt spid="4"/>
-                                        </p:tgtEl>
-                                        <p:attrNameLst>
-                                          <p:attrName>ppt_h</p:attrName>
-                                        </p:attrNameLst>
-                                      </p:cBhvr>
-                                      <p:tavLst>
-                                        <p:tav tm="0">
-                                          <p:val>
-                                            <p:strVal val="#ppt_h"/>
-                                          </p:val>
-                                        </p:tav>
-                                        <p:tav tm="100000">
-                                          <p:val>
-                                            <p:strVal val="#ppt_h"/>
-                                          </p:val>
-                                        </p:tav>
-                                      </p:tavLst>
-                                    </p:anim>
-                                  </p:childTnLst>
-                                </p:cTn>
-                              </p:par>
-                            </p:childTnLst>
-                          </p:cTn>
-                        </p:par>
-                      </p:childTnLst>
-                    </p:cTn>
-                  </p:par>
-                </p:childTnLst>
-              </p:cTn>
-              <p:prevCondLst>
-                <p:cond evt="onPrev" delay="0">
-                  <p:tgtEl>
-                    <p:sldTgt/>
-                  </p:tgtEl>
-                </p:cond>
-              </p:prevCondLst>
-              <p:nextCondLst>
-                <p:cond evt="onNext" delay="0">
-                  <p:tgtEl>
-                    <p:sldTgt/>
-                  </p:tgtEl>
-                </p:cond>
-              </p:nextCondLst>
-            </p:seq>
-          </p:childTnLst>
-        </p:cTn>
-      </p:par>
-    </p:tnLst>
-  </p:timing>
 </p:sld>
 </file>
 
@@ -39962,7 +39466,7 @@
                                 <p:nvPr/>
                               </p:nvPicPr>
                               <p:blipFill>
-                                <a:blip r:embed="rId5"/>
+                                <a:blip r:embed="rId8"/>
                                 <a:stretch>
                                   <a:fillRect/>
                                 </a:stretch>
